--- a/carpentry/intake-142/PowerPoint/Day-19_2026-12-01_Week-6.pptx
+++ b/carpentry/intake-142/PowerPoint/Day-19_2026-12-01_Week-6.pptx
@@ -1193,7 +1193,7 @@
           <a:p/>
           <a:p>
             <a:r>
-              <a:t>The textbook on page 173 describes a prism as equal end layers extending along a length. First find the area of one end; then multiply by how far that same end shape continues. A box has a rectangular end, so end area times length becomes the product of three dimensions. Why does this method work? The cross-section stays the same along the prism. It also explains the units: square units for the end multiplied by a length unit produce cubic units. Point to the end and the direction of extension in the picture before writing the formula.</a:t>
+              <a:t>The textbook on page 269 describes a prism as equal end layers extending along a length. First find the area of one end; then multiply by how far that same end shape continues. A box has a rectangular end, so end area times length becomes the product of three dimensions. Why does this method work? The cross-section stays the same along the prism. It also explains the units: square units for the end multiplied by a length unit produce cubic units. Point to the end and the direction of extension in the picture before writing the formula.</a:t>
             </a:r>
           </a:p>
         </p:txBody>
@@ -2743,7 +2743,7 @@
           <a:p/>
           <a:p>
             <a:r>
-              <a:t>On page 177, the textbook describes every cylinder slice as the same circle. That is why the formula works like the prism formula: end area times length. The circular end area is πr², so multiplying by the cylinder’s height or length gives πr²h. For a horizontal pipe, does h have to point upward? No; it represents the distance along the cylinder. Which radius should be used for capacity? The inside radius, because the fluid occupies the interior. The outside radius describes a larger cylinder that includes the wall thickness.</a:t>
+              <a:t>On page 273, the textbook describes every cylinder slice as the same circle. That is why the formula works like the prism formula: end area times length. The circular end area is πr², so multiplying by the cylinder’s height or length gives πr²h. For a horizontal pipe, does h have to point upward? No; it represents the distance along the cylinder. Which radius should be used for capacity? The inside radius, because the fluid occupies the interior. The outside radius describes a larger cylinder that includes the wall thickness.</a:t>
             </a:r>
           </a:p>
         </p:txBody>
@@ -2819,7 +2819,7 @@
           <a:p/>
           <a:p>
             <a:r>
-              <a:t>Example 11.6 on page 178 gives a tank 800 millimetres across inside and 1,200 millimetres high. The radius is 800 divided by two, or 400 millimetres. Calculate π times 400 squared times 1,200: about 603,185,789.49 cubic millimetres. Divide by one million to obtain 603.18578949 litres, then round to 603.19 litres. Why should we keep the full calculator value until the final rounding? It avoids compounding approximations. Why use the inside diameter? Capacity describes the water space, not the space occupied by the tank walls.</a:t>
+              <a:t>Example 11.6 on page 274 gives a tank 800 millimetres across inside and 1,200 millimetres high. The radius is 800 divided by two, or 400 millimetres. Calculate π times 400 squared times 1,200: about 603,185,789.49 cubic millimetres. Divide by one million to obtain 603.18578949 litres, then round to 603.19 litres. Why should we keep the full calculator value until the final rounding? It avoids compounding approximations. Why use the inside diameter? Capacity describes the water space, not the space occupied by the tank walls.</a:t>
             </a:r>
           </a:p>
         </p:txBody>
@@ -5445,7 +5445,7 @@
                 </a:solidFill>
                 <a:latin typeface="Arial"/>
               </a:rPr>
-              <a:t>Textbook sections 11.1–11.3 pp.172–176; sections 7.4 pp.113–115</a:t>
+              <a:t>Textbook sections 11.1–11.3 pp.268–272; sections 7.4 pp.170–172</a:t>
             </a:r>
           </a:p>
         </p:txBody>
@@ -6203,7 +6203,7 @@
                 </a:solidFill>
                 <a:latin typeface="Arial"/>
               </a:rPr>
-              <a:t>Textbook sections 11.1–11.3 pp.172–176; sections 7.4 pp.113–115</a:t>
+              <a:t>Textbook sections 11.1–11.3 pp.268–272; sections 7.4 pp.170–172</a:t>
             </a:r>
           </a:p>
         </p:txBody>
@@ -6403,7 +6403,7 @@
                 </a:solidFill>
                 <a:latin typeface="Arial"/>
               </a:rPr>
-              <a:t>Resources: Exercise Book 11A Q1–10 (p.69); 11B Q1,5 (p.71)</a:t>
+              <a:t>Resources: Exercise Book 11A Q1–10 (p.103); 11B Q1,5 (p.105)</a:t>
             </a:r>
           </a:p>
         </p:txBody>
@@ -7017,7 +7017,7 @@
                 </a:solidFill>
                 <a:latin typeface="Arial"/>
               </a:rPr>
-              <a:t>Textbook sections 11.1–11.3 pp.172–176; sections 7.4 pp.113–115</a:t>
+              <a:t>Textbook sections 11.1–11.3 pp.268–272; sections 7.4 pp.170–172</a:t>
             </a:r>
           </a:p>
         </p:txBody>
@@ -7748,7 +7748,7 @@
                 </a:solidFill>
                 <a:latin typeface="Arial"/>
               </a:rPr>
-              <a:t>Textbook sections 11.1–11.3 pp.172–176; sections 7.4 pp.113–115</a:t>
+              <a:t>Textbook sections 11.1–11.3 pp.268–272; sections 7.4 pp.170–172</a:t>
             </a:r>
           </a:p>
         </p:txBody>
@@ -8482,7 +8482,7 @@
                 </a:solidFill>
                 <a:latin typeface="Arial"/>
               </a:rPr>
-              <a:t>Textbook sections 11.1–11.3 pp.172–176; sections 7.4 pp.113–115</a:t>
+              <a:t>Textbook sections 11.1–11.3 pp.268–272; sections 7.4 pp.170–172</a:t>
             </a:r>
           </a:p>
         </p:txBody>
@@ -8682,7 +8682,7 @@
                 </a:solidFill>
                 <a:latin typeface="Arial"/>
               </a:rPr>
-              <a:t>Resources: Exercise Book 11A Q1–10 (p.69); 11B Q1,5 (p.71)</a:t>
+              <a:t>Resources: Exercise Book 11A Q1–10 (p.103); 11B Q1,5 (p.105)</a:t>
             </a:r>
           </a:p>
         </p:txBody>
@@ -9296,7 +9296,7 @@
                 </a:solidFill>
                 <a:latin typeface="Arial"/>
               </a:rPr>
-              <a:t>Textbook sections 11.1–11.3 pp.172–176; sections 7.4 pp.113–115</a:t>
+              <a:t>Textbook sections 11.1–11.3 pp.268–272; sections 7.4 pp.170–172</a:t>
             </a:r>
           </a:p>
         </p:txBody>
@@ -10072,7 +10072,7 @@
                 </a:solidFill>
                 <a:latin typeface="Arial"/>
               </a:rPr>
-              <a:t>Textbook sections 11.1–11.3 pp.172–176; sections 7.4 pp.113–115</a:t>
+              <a:t>Textbook sections 11.1–11.3 pp.268–272; sections 7.4 pp.170–172</a:t>
             </a:r>
           </a:p>
         </p:txBody>
@@ -11031,7 +11031,7 @@
                 </a:solidFill>
                 <a:latin typeface="Arial"/>
               </a:rPr>
-              <a:t>Textbook sections 11.1–11.3 pp.172–176; sections 7.4 pp.113–115</a:t>
+              <a:t>Textbook sections 11.1–11.3 pp.268–272; sections 7.4 pp.170–172</a:t>
             </a:r>
           </a:p>
         </p:txBody>
@@ -11742,7 +11742,7 @@
                 </a:solidFill>
                 <a:latin typeface="Arial"/>
               </a:rPr>
-              <a:t>Textbook sections 11.1–11.3 pp.172–176; sections 7.4 pp.113–115</a:t>
+              <a:t>Textbook sections 11.1–11.3 pp.268–272; sections 7.4 pp.170–172</a:t>
             </a:r>
           </a:p>
         </p:txBody>
@@ -12428,7 +12428,7 @@
                 </a:solidFill>
                 <a:latin typeface="Arial"/>
               </a:rPr>
-              <a:t>Textbook sections 11.1–11.3 pp.172–176; sections 7.4 pp.113–115</a:t>
+              <a:t>Textbook sections 11.1–11.3 pp.268–272; sections 7.4 pp.170–172</a:t>
             </a:r>
           </a:p>
         </p:txBody>
@@ -12628,7 +12628,7 @@
                 </a:solidFill>
                 <a:latin typeface="Arial"/>
               </a:rPr>
-              <a:t>Resources: Exercise Book 11A Q1–10 (p.69); 11B Q1,5 (p.71)</a:t>
+              <a:t>Resources: Exercise Book 11A Q1–10 (p.103); 11B Q1,5 (p.105)</a:t>
             </a:r>
           </a:p>
         </p:txBody>
@@ -16594,7 +16594,7 @@
                 </a:solidFill>
                 <a:latin typeface="Arial"/>
               </a:rPr>
-              <a:t>Textbook sections 11.1–11.3 pp.172–176; sections 7.4 pp.113–115</a:t>
+              <a:t>Textbook sections 11.1–11.3 pp.268–272; sections 7.4 pp.170–172</a:t>
             </a:r>
           </a:p>
         </p:txBody>
@@ -17305,7 +17305,7 @@
                 </a:solidFill>
                 <a:latin typeface="Arial"/>
               </a:rPr>
-              <a:t>Textbook sections 11.1–11.3 pp.172–176; sections 7.4 pp.113–115</a:t>
+              <a:t>Textbook sections 11.1–11.3 pp.268–272; sections 7.4 pp.170–172</a:t>
             </a:r>
           </a:p>
         </p:txBody>
@@ -18016,7 +18016,7 @@
                 </a:solidFill>
                 <a:latin typeface="Arial"/>
               </a:rPr>
-              <a:t>Textbook sections 11.1–11.3 pp.172–176; sections 7.4 pp.113–115</a:t>
+              <a:t>Textbook sections 11.1–11.3 pp.268–272; sections 7.4 pp.170–172</a:t>
             </a:r>
           </a:p>
         </p:txBody>
@@ -18216,7 +18216,7 @@
                 </a:solidFill>
                 <a:latin typeface="Arial"/>
               </a:rPr>
-              <a:t>Resources: Exercise Book 11A Q1–10 (p.69); 11B Q1,5 (p.71)</a:t>
+              <a:t>Resources: Exercise Book 11A Q1–10 (p.103); 11B Q1,5 (p.105)</a:t>
             </a:r>
           </a:p>
         </p:txBody>
@@ -19495,7 +19495,7 @@
                 </a:solidFill>
                 <a:latin typeface="Arial"/>
               </a:rPr>
-              <a:t>Textbook sections 11.3–11.4 pp.175–178; sections 8.6 pp.131–133</a:t>
+              <a:t>Textbook sections 11.3–11.4 pp.271–274; sections 8.6 pp.201–203</a:t>
             </a:r>
           </a:p>
         </p:txBody>
@@ -19695,7 +19695,7 @@
                 </a:solidFill>
                 <a:latin typeface="Arial"/>
               </a:rPr>
-              <a:t>Textbook sections 11.3–11.4 pp.175–178; sections 8.6 pp.131–133</a:t>
+              <a:t>Textbook sections 11.3–11.4 pp.271–274; sections 8.6 pp.201–203</a:t>
             </a:r>
           </a:p>
         </p:txBody>
@@ -19743,7 +19743,7 @@
                 </a:solidFill>
                 <a:latin typeface="Arial"/>
               </a:rPr>
-              <a:t>Exercise Book 11A Q11–13,19,21–22 (p.70); 11B Q2 (p.71); 11C Q1–2 (p.73)</a:t>
+              <a:t>Exercise Book 11A Q11–13,19,21–22 (p.104); 11B Q2 (p.105); 11C Q1–2 (p.107)</a:t>
             </a:r>
           </a:p>
         </p:txBody>
@@ -20405,7 +20405,7 @@
                 </a:solidFill>
                 <a:latin typeface="Arial"/>
               </a:rPr>
-              <a:t>Textbook sections 11.3–11.4 pp.175–178; sections 8.6 pp.131–133</a:t>
+              <a:t>Textbook sections 11.3–11.4 pp.271–274; sections 8.6 pp.201–203</a:t>
             </a:r>
           </a:p>
         </p:txBody>
@@ -20605,7 +20605,7 @@
                 </a:solidFill>
                 <a:latin typeface="Arial"/>
               </a:rPr>
-              <a:t>Resources: Exercise Book 11A Q11–13,19,21–22 (p.70); 11B Q2 (p.71); 11C Q1–2 (p.73)</a:t>
+              <a:t>Resources: Exercise Book 11A Q11–13,19,21–22 (p.104); 11B Q2 (p.105); 11C Q1–2 (p.107)</a:t>
             </a:r>
           </a:p>
         </p:txBody>
@@ -21354,7 +21354,7 @@
                 </a:solidFill>
                 <a:latin typeface="Arial"/>
               </a:rPr>
-              <a:t>Textbook sections 11.3–11.4 pp.175–178; sections 8.6 pp.131–133</a:t>
+              <a:t>Textbook sections 11.3–11.4 pp.271–274; sections 8.6 pp.201–203</a:t>
             </a:r>
           </a:p>
         </p:txBody>
@@ -22599,7 +22599,7 @@
                 </a:solidFill>
                 <a:latin typeface="Arial"/>
               </a:rPr>
-              <a:t>Textbook sections 11.3–11.4 pp.175–178; sections 8.6 pp.131–133</a:t>
+              <a:t>Textbook sections 11.3–11.4 pp.271–274; sections 8.6 pp.201–203</a:t>
             </a:r>
           </a:p>
         </p:txBody>
@@ -23941,7 +23941,7 @@
                 <a:ea typeface="Arial" pitchFamily="34" charset="-122"/>
                 <a:cs typeface="Arial" pitchFamily="34" charset="-120"/>
               </a:rPr>
-              <a:t>Exercise Book pp.70,73 • Numeracy Hub Volume and capacity; Unit Conversions for explicitly labelled L/US gal</a:t>
+              <a:t>Exercise Book pp.104,107 • Numeracy Hub Volume and capacity; Unit Conversions for explicitly labelled L/US gal</a:t>
             </a:r>
             <a:endParaRPr lang="en-US" sz="1050" dirty="0"/>
           </a:p>
@@ -24513,7 +24513,7 @@
                 </a:solidFill>
                 <a:latin typeface="Arial"/>
               </a:rPr>
-              <a:t>Textbook  |  page 177</a:t>
+              <a:t>Textbook  |  page 273</a:t>
             </a:r>
           </a:p>
         </p:txBody>
@@ -24561,7 +24561,7 @@
                 </a:solidFill>
                 <a:latin typeface="Arial"/>
               </a:rPr>
-              <a:t>Textbook sections 11.3–11.4 pp.175–178; sections 8.6 pp.131–133</a:t>
+              <a:t>Textbook sections 11.3–11.4 pp.271–274; sections 8.6 pp.201–203</a:t>
             </a:r>
           </a:p>
         </p:txBody>
@@ -24633,7 +24633,7 @@
                 </a:solidFill>
                 <a:latin typeface="Arial"/>
               </a:rPr>
-              <a:t>Textbook p.177 • Cylinder volume — Circular base area times height</a:t>
+              <a:t>Textbook p.273 • Cylinder volume — Circular base area times height</a:t>
             </a:r>
           </a:p>
         </p:txBody>
@@ -25202,7 +25202,7 @@
                 </a:solidFill>
                 <a:latin typeface="Arial"/>
               </a:rPr>
-              <a:t>Textbook sections 11.1–11.3 pp.172–176; sections 7.4 pp.113–115</a:t>
+              <a:t>Textbook sections 11.1–11.3 pp.268–272; sections 7.4 pp.170–172</a:t>
             </a:r>
           </a:p>
         </p:txBody>
@@ -25402,7 +25402,7 @@
                 </a:solidFill>
                 <a:latin typeface="Arial"/>
               </a:rPr>
-              <a:t>Textbook sections 11.1–11.3 pp.172–176; sections 7.4 pp.113–115</a:t>
+              <a:t>Textbook sections 11.1–11.3 pp.268–272; sections 7.4 pp.170–172</a:t>
             </a:r>
           </a:p>
         </p:txBody>
@@ -25450,7 +25450,7 @@
                 </a:solidFill>
                 <a:latin typeface="Arial"/>
               </a:rPr>
-              <a:t>Exercise Book 11A Q1–10 (p.69); 11B Q1,5 (p.71)</a:t>
+              <a:t>Exercise Book 11A Q1–10 (p.103); 11B Q1,5 (p.105)</a:t>
             </a:r>
           </a:p>
         </p:txBody>
@@ -26064,7 +26064,7 @@
                 </a:solidFill>
                 <a:latin typeface="Arial"/>
               </a:rPr>
-              <a:t>Textbook  |  page 178</a:t>
+              <a:t>Textbook  |  page 274</a:t>
             </a:r>
           </a:p>
         </p:txBody>
@@ -26112,7 +26112,7 @@
                 </a:solidFill>
                 <a:latin typeface="Arial"/>
               </a:rPr>
-              <a:t>Textbook sections 11.3–11.4 pp.175–178; sections 8.6 pp.131–133</a:t>
+              <a:t>Textbook sections 11.3–11.4 pp.271–274; sections 8.6 pp.201–203</a:t>
             </a:r>
           </a:p>
         </p:txBody>
@@ -26184,7 +26184,7 @@
                 </a:solidFill>
                 <a:latin typeface="Arial"/>
               </a:rPr>
-              <a:t>Textbook p.178 • Example 11.6 — Cylinder dimensions and capacity</a:t>
+              <a:t>Textbook p.274 • Example 11.6 — Cylinder dimensions and capacity</a:t>
             </a:r>
           </a:p>
         </p:txBody>
@@ -26798,7 +26798,7 @@
                 </a:solidFill>
                 <a:latin typeface="Arial"/>
               </a:rPr>
-              <a:t>Textbook sections 11.3–11.4 pp.175–178; sections 8.6 pp.131–133</a:t>
+              <a:t>Textbook sections 11.3–11.4 pp.271–274; sections 8.6 pp.201–203</a:t>
             </a:r>
           </a:p>
         </p:txBody>
@@ -27556,7 +27556,7 @@
                 </a:solidFill>
                 <a:latin typeface="Arial"/>
               </a:rPr>
-              <a:t>Textbook sections 11.3–11.4 pp.175–178; sections 8.6 pp.131–133</a:t>
+              <a:t>Textbook sections 11.3–11.4 pp.271–274; sections 8.6 pp.201–203</a:t>
             </a:r>
           </a:p>
         </p:txBody>
@@ -27756,7 +27756,7 @@
                 </a:solidFill>
                 <a:latin typeface="Arial"/>
               </a:rPr>
-              <a:t>Resources: Exercise Book 11A Q11–13,19,21–22 (p.70); 11B Q2 (p.71); 11C Q1–2 (p.73)</a:t>
+              <a:t>Resources: Exercise Book 11A Q11–13,19,21–22 (p.104); 11B Q2 (p.105); 11C Q1–2 (p.107)</a:t>
             </a:r>
           </a:p>
         </p:txBody>
@@ -28370,7 +28370,7 @@
                 </a:solidFill>
                 <a:latin typeface="Arial"/>
               </a:rPr>
-              <a:t>Textbook sections 11.3–11.4 pp.175–178; sections 8.6 pp.131–133</a:t>
+              <a:t>Textbook sections 11.3–11.4 pp.271–274; sections 8.6 pp.201–203</a:t>
             </a:r>
           </a:p>
         </p:txBody>
@@ -29126,7 +29126,7 @@
                 </a:solidFill>
                 <a:latin typeface="Arial"/>
               </a:rPr>
-              <a:t>Textbook sections 11.3–11.4 pp.175–178; sections 8.6 pp.131–133</a:t>
+              <a:t>Textbook sections 11.3–11.4 pp.271–274; sections 8.6 pp.201–203</a:t>
             </a:r>
           </a:p>
         </p:txBody>
@@ -29860,7 +29860,7 @@
                 </a:solidFill>
                 <a:latin typeface="Arial"/>
               </a:rPr>
-              <a:t>Textbook sections 11.3–11.4 pp.175–178; sections 8.6 pp.131–133</a:t>
+              <a:t>Textbook sections 11.3–11.4 pp.271–274; sections 8.6 pp.201–203</a:t>
             </a:r>
           </a:p>
         </p:txBody>
@@ -30060,7 +30060,7 @@
                 </a:solidFill>
                 <a:latin typeface="Arial"/>
               </a:rPr>
-              <a:t>Resources: Exercise Book 11A Q11–13,19,21–22 (p.70); 11B Q2 (p.71); 11C Q1–2 (p.73)</a:t>
+              <a:t>Resources: Exercise Book 11A Q11–13,19,21–22 (p.104); 11B Q2 (p.105); 11C Q1–2 (p.107)</a:t>
             </a:r>
           </a:p>
         </p:txBody>
@@ -30674,7 +30674,7 @@
                 </a:solidFill>
                 <a:latin typeface="Arial"/>
               </a:rPr>
-              <a:t>Textbook sections 11.3–11.4 pp.175–178; sections 8.6 pp.131–133</a:t>
+              <a:t>Textbook sections 11.3–11.4 pp.271–274; sections 8.6 pp.201–203</a:t>
             </a:r>
           </a:p>
         </p:txBody>
@@ -31450,7 +31450,7 @@
                 </a:solidFill>
                 <a:latin typeface="Arial"/>
               </a:rPr>
-              <a:t>Textbook sections 11.3–11.4 pp.175–178; sections 8.6 pp.131–133</a:t>
+              <a:t>Textbook sections 11.3–11.4 pp.271–274; sections 8.6 pp.201–203</a:t>
             </a:r>
           </a:p>
         </p:txBody>
@@ -32409,7 +32409,7 @@
                 </a:solidFill>
                 <a:latin typeface="Arial"/>
               </a:rPr>
-              <a:t>Textbook sections 11.3–11.4 pp.175–178; sections 8.6 pp.131–133</a:t>
+              <a:t>Textbook sections 11.3–11.4 pp.271–274; sections 8.6 pp.201–203</a:t>
             </a:r>
           </a:p>
         </p:txBody>
@@ -33120,7 +33120,7 @@
                 </a:solidFill>
                 <a:latin typeface="Arial"/>
               </a:rPr>
-              <a:t>Textbook sections 11.3–11.4 pp.175–178; sections 8.6 pp.131–133</a:t>
+              <a:t>Textbook sections 11.3–11.4 pp.271–274; sections 8.6 pp.201–203</a:t>
             </a:r>
           </a:p>
         </p:txBody>
@@ -33807,7 +33807,7 @@
                 </a:solidFill>
                 <a:latin typeface="Arial"/>
               </a:rPr>
-              <a:t>Textbook sections 11.1–11.3 pp.172–176; sections 7.4 pp.113–115</a:t>
+              <a:t>Textbook sections 11.1–11.3 pp.268–272; sections 7.4 pp.170–172</a:t>
             </a:r>
           </a:p>
         </p:txBody>
@@ -34007,7 +34007,7 @@
                 </a:solidFill>
                 <a:latin typeface="Arial"/>
               </a:rPr>
-              <a:t>Resources: Exercise Book 11A Q1–10 (p.69); 11B Q1,5 (p.71)</a:t>
+              <a:t>Resources: Exercise Book 11A Q1–10 (p.103); 11B Q1,5 (p.105)</a:t>
             </a:r>
           </a:p>
         </p:txBody>
@@ -34621,7 +34621,7 @@
                 </a:solidFill>
                 <a:latin typeface="Arial"/>
               </a:rPr>
-              <a:t>Textbook sections 11.3–11.4 pp.175–178; sections 8.6 pp.131–133</a:t>
+              <a:t>Textbook sections 11.3–11.4 pp.271–274; sections 8.6 pp.201–203</a:t>
             </a:r>
           </a:p>
         </p:txBody>
@@ -34821,7 +34821,7 @@
                 </a:solidFill>
                 <a:latin typeface="Arial"/>
               </a:rPr>
-              <a:t>Resources: Exercise Book 11A Q11–13,19,21–22 (p.70); 11B Q2 (p.71); 11C Q1–2 (p.73)</a:t>
+              <a:t>Resources: Exercise Book 11A Q11–13,19,21–22 (p.104); 11B Q2 (p.105); 11C Q1–2 (p.107)</a:t>
             </a:r>
           </a:p>
         </p:txBody>
@@ -35435,7 +35435,7 @@
                 </a:solidFill>
                 <a:latin typeface="Arial"/>
               </a:rPr>
-              <a:t>Textbook sections 11.3–11.4 pp.175–178; sections 8.6 pp.131–133</a:t>
+              <a:t>Textbook sections 11.3–11.4 pp.271–274; sections 8.6 pp.201–203</a:t>
             </a:r>
           </a:p>
         </p:txBody>
@@ -36146,7 +36146,7 @@
                 </a:solidFill>
                 <a:latin typeface="Arial"/>
               </a:rPr>
-              <a:t>Textbook sections 11.3–11.4 pp.175–178; sections 8.6 pp.131–133</a:t>
+              <a:t>Textbook sections 11.3–11.4 pp.271–274; sections 8.6 pp.201–203</a:t>
             </a:r>
           </a:p>
         </p:txBody>
@@ -36833,7 +36833,7 @@
                 </a:solidFill>
                 <a:latin typeface="Arial"/>
               </a:rPr>
-              <a:t>Textbook sections 11.3–11.4 pp.175–178; sections 8.6 pp.131–133</a:t>
+              <a:t>Textbook sections 11.3–11.4 pp.271–274; sections 8.6 pp.201–203</a:t>
             </a:r>
           </a:p>
         </p:txBody>
@@ -37033,7 +37033,7 @@
                 </a:solidFill>
                 <a:latin typeface="Arial"/>
               </a:rPr>
-              <a:t>Resources: Exercise Book 11A Q11–13,19,21–22 (p.70); 11B Q2 (p.71); 11C Q1–2 (p.73)</a:t>
+              <a:t>Resources: Exercise Book 11A Q11–13,19,21–22 (p.104); 11B Q2 (p.105); 11C Q1–2 (p.107)</a:t>
             </a:r>
           </a:p>
         </p:txBody>
@@ -37782,7 +37782,7 @@
                 </a:solidFill>
                 <a:latin typeface="Arial"/>
               </a:rPr>
-              <a:t>Textbook sections 11.1–11.3 pp.172–176; sections 7.4 pp.113–115</a:t>
+              <a:t>Textbook sections 11.1–11.3 pp.268–272; sections 7.4 pp.170–172</a:t>
             </a:r>
           </a:p>
         </p:txBody>
@@ -39027,7 +39027,7 @@
                 </a:solidFill>
                 <a:latin typeface="Arial"/>
               </a:rPr>
-              <a:t>Textbook sections 11.1–11.3 pp.172–176; sections 7.4 pp.113–115</a:t>
+              <a:t>Textbook sections 11.1–11.3 pp.268–272; sections 7.4 pp.170–172</a:t>
             </a:r>
           </a:p>
         </p:txBody>
@@ -40393,7 +40393,7 @@
                 <a:ea typeface="Arial" pitchFamily="34" charset="-122"/>
                 <a:cs typeface="Arial" pitchFamily="34" charset="-120"/>
               </a:rPr>
-              <a:t>Exercise Book 11B Q1 p.71 • Numeracy Hub → Volume and Layout → Volume and capacity</a:t>
+              <a:t>Exercise Book 11B Q1 p.105 • Numeracy Hub → Volume and Layout → Volume and capacity</a:t>
             </a:r>
             <a:endParaRPr lang="en-US" sz="1050" dirty="0"/>
           </a:p>
@@ -40965,7 +40965,7 @@
                 </a:solidFill>
                 <a:latin typeface="Arial"/>
               </a:rPr>
-              <a:t>Textbook  |  page 173</a:t>
+              <a:t>Textbook  |  page 269</a:t>
             </a:r>
           </a:p>
         </p:txBody>
@@ -41013,7 +41013,7 @@
                 </a:solidFill>
                 <a:latin typeface="Arial"/>
               </a:rPr>
-              <a:t>Textbook sections 11.1–11.3 pp.172–176; sections 7.4 pp.113–115</a:t>
+              <a:t>Textbook sections 11.1–11.3 pp.268–272; sections 7.4 pp.170–172</a:t>
             </a:r>
           </a:p>
         </p:txBody>
@@ -41085,7 +41085,7 @@
                 </a:solidFill>
                 <a:latin typeface="Arial"/>
               </a:rPr>
-              <a:t>Textbook p.173 • Volume of a prism — End area times length</a:t>
+              <a:t>Textbook p.269 • Volume of a prism — End area times length</a:t>
             </a:r>
           </a:p>
         </p:txBody>
@@ -41651,7 +41651,7 @@
                 </a:solidFill>
                 <a:latin typeface="Arial"/>
               </a:rPr>
-              <a:t>Textbook  |  page 173</a:t>
+              <a:t>Textbook  |  page 269</a:t>
             </a:r>
           </a:p>
         </p:txBody>
@@ -41699,7 +41699,7 @@
                 </a:solidFill>
                 <a:latin typeface="Arial"/>
               </a:rPr>
-              <a:t>Textbook sections 11.1–11.3 pp.172–176; sections 7.4 pp.113–115</a:t>
+              <a:t>Textbook sections 11.1–11.3 pp.268–272; sections 7.4 pp.170–172</a:t>
             </a:r>
           </a:p>
         </p:txBody>
@@ -41771,7 +41771,7 @@
                 </a:solidFill>
                 <a:latin typeface="Arial"/>
               </a:rPr>
-              <a:t>Textbook p.173 • Example 11.1 — Three dimensions of a rectangular tank</a:t>
+              <a:t>Textbook p.269 • Example 11.1 — Three dimensions of a rectangular tank</a:t>
             </a:r>
           </a:p>
         </p:txBody>

--- a/carpentry/intake-142/PowerPoint/Day-19_2026-12-01_Week-6.pptx
+++ b/carpentry/intake-142/PowerPoint/Day-19_2026-12-01_Week-6.pptx
@@ -18489,6 +18489,104 @@
           </a:p>
         </p:txBody>
       </p:sp>
+      <p:sp>
+        <p:nvSpPr>
+          <p:cNvPr id="22" name="Play quiz W06-L03"/>
+          <p:cNvSpPr txBox="1"/>
+          <p:nvPr/>
+        </p:nvSpPr>
+        <p:spPr>
+          <a:xfrm>
+            <a:off x="6355080" y="6606540"/>
+            <a:ext cx="822960" cy="210312"/>
+          </a:xfrm>
+          <a:prstGeom prst="rect">
+            <a:avLst/>
+          </a:prstGeom>
+          <a:noFill/>
+        </p:spPr>
+        <p:txBody>
+          <a:bodyPr wrap="square" lIns="0" rIns="0" tIns="0" bIns="0" anchor="t">
+            <a:normAutofit fontScale="100000" lnSpcReduction="0"/>
+          </a:bodyPr>
+          <a:lstStyle/>
+          <a:p>
+            <a:pPr>
+              <a:spcBef>
+                <a:spcPts val="0"/>
+              </a:spcBef>
+              <a:spcAft>
+                <a:spcPts val="0"/>
+              </a:spcAft>
+              <a:defRPr sz="1000" b="0">
+                <a:solidFill>
+                  <a:srgbClr val="D0002B"/>
+                </a:solidFill>
+                <a:latin typeface="Arial"/>
+              </a:defRPr>
+            </a:pPr>
+            <a:r>
+              <a:rPr sz="1000">
+                <a:solidFill>
+                  <a:srgbClr val="F7F8FC"/>
+                </a:solidFill>
+                <a:latin typeface="Arial"/>
+                <a:hlinkClick r:id="rId8"/>
+              </a:rPr>
+              <a:t>Play quiz</a:t>
+            </a:r>
+          </a:p>
+        </p:txBody>
+      </p:sp>
+      <p:sp>
+        <p:nvSpPr>
+          <p:cNvPr id="23" name="Quiz PDF W06-L03"/>
+          <p:cNvSpPr txBox="1"/>
+          <p:nvPr/>
+        </p:nvSpPr>
+        <p:spPr>
+          <a:xfrm>
+            <a:off x="7296912" y="6606540"/>
+            <a:ext cx="1005840" cy="210312"/>
+          </a:xfrm>
+          <a:prstGeom prst="rect">
+            <a:avLst/>
+          </a:prstGeom>
+          <a:noFill/>
+        </p:spPr>
+        <p:txBody>
+          <a:bodyPr wrap="square" lIns="0" rIns="0" tIns="0" bIns="0" anchor="t">
+            <a:normAutofit fontScale="100000" lnSpcReduction="0"/>
+          </a:bodyPr>
+          <a:lstStyle/>
+          <a:p>
+            <a:pPr>
+              <a:spcBef>
+                <a:spcPts val="0"/>
+              </a:spcBef>
+              <a:spcAft>
+                <a:spcPts val="0"/>
+              </a:spcAft>
+              <a:defRPr sz="1000" b="0">
+                <a:solidFill>
+                  <a:srgbClr val="D0002B"/>
+                </a:solidFill>
+                <a:latin typeface="Arial"/>
+              </a:defRPr>
+            </a:pPr>
+            <a:r>
+              <a:rPr sz="1000">
+                <a:solidFill>
+                  <a:srgbClr val="F7F8FC"/>
+                </a:solidFill>
+                <a:latin typeface="Arial"/>
+                <a:hlinkClick r:id="rId9"/>
+              </a:rPr>
+              <a:t>Quiz PDF</a:t>
+            </a:r>
+          </a:p>
+        </p:txBody>
+      </p:sp>
     </p:spTree>
   </p:cSld>
   <p:clrMapOvr>
@@ -37302,6 +37400,104 @@
                 <a:latin typeface="Arial"/>
               </a:rPr>
               <a:t>Day 19  •  2026-12-01  •  43</a:t>
+            </a:r>
+          </a:p>
+        </p:txBody>
+      </p:sp>
+      <p:sp>
+        <p:nvSpPr>
+          <p:cNvPr id="22" name="Play quiz W06-L04"/>
+          <p:cNvSpPr txBox="1"/>
+          <p:nvPr/>
+        </p:nvSpPr>
+        <p:spPr>
+          <a:xfrm>
+            <a:off x="6355080" y="6606540"/>
+            <a:ext cx="822960" cy="210312"/>
+          </a:xfrm>
+          <a:prstGeom prst="rect">
+            <a:avLst/>
+          </a:prstGeom>
+          <a:noFill/>
+        </p:spPr>
+        <p:txBody>
+          <a:bodyPr wrap="square" lIns="0" rIns="0" tIns="0" bIns="0" anchor="t">
+            <a:normAutofit fontScale="100000" lnSpcReduction="0"/>
+          </a:bodyPr>
+          <a:lstStyle/>
+          <a:p>
+            <a:pPr>
+              <a:spcBef>
+                <a:spcPts val="0"/>
+              </a:spcBef>
+              <a:spcAft>
+                <a:spcPts val="0"/>
+              </a:spcAft>
+              <a:defRPr sz="1000" b="0">
+                <a:solidFill>
+                  <a:srgbClr val="D0002B"/>
+                </a:solidFill>
+                <a:latin typeface="Arial"/>
+              </a:defRPr>
+            </a:pPr>
+            <a:r>
+              <a:rPr sz="1000">
+                <a:solidFill>
+                  <a:srgbClr val="F7F8FC"/>
+                </a:solidFill>
+                <a:latin typeface="Arial"/>
+                <a:hlinkClick r:id="rId8"/>
+              </a:rPr>
+              <a:t>Play quiz</a:t>
+            </a:r>
+          </a:p>
+        </p:txBody>
+      </p:sp>
+      <p:sp>
+        <p:nvSpPr>
+          <p:cNvPr id="23" name="Quiz PDF W06-L04"/>
+          <p:cNvSpPr txBox="1"/>
+          <p:nvPr/>
+        </p:nvSpPr>
+        <p:spPr>
+          <a:xfrm>
+            <a:off x="7296912" y="6606540"/>
+            <a:ext cx="1005840" cy="210312"/>
+          </a:xfrm>
+          <a:prstGeom prst="rect">
+            <a:avLst/>
+          </a:prstGeom>
+          <a:noFill/>
+        </p:spPr>
+        <p:txBody>
+          <a:bodyPr wrap="square" lIns="0" rIns="0" tIns="0" bIns="0" anchor="t">
+            <a:normAutofit fontScale="100000" lnSpcReduction="0"/>
+          </a:bodyPr>
+          <a:lstStyle/>
+          <a:p>
+            <a:pPr>
+              <a:spcBef>
+                <a:spcPts val="0"/>
+              </a:spcBef>
+              <a:spcAft>
+                <a:spcPts val="0"/>
+              </a:spcAft>
+              <a:defRPr sz="1000" b="0">
+                <a:solidFill>
+                  <a:srgbClr val="D0002B"/>
+                </a:solidFill>
+                <a:latin typeface="Arial"/>
+              </a:defRPr>
+            </a:pPr>
+            <a:r>
+              <a:rPr sz="1000">
+                <a:solidFill>
+                  <a:srgbClr val="F7F8FC"/>
+                </a:solidFill>
+                <a:latin typeface="Arial"/>
+                <a:hlinkClick r:id="rId9"/>
+              </a:rPr>
+              <a:t>Quiz PDF</a:t>
             </a:r>
           </a:p>
         </p:txBody>
